--- a/public/videos/repositories/golf-search/golf-search-tech-preview.pptx
+++ b/public/videos/repositories/golf-search/golf-search-tech-preview.pptx
@@ -134,7 +134,7 @@
           <p:cNvPr id="2" name="タイトル 1">
             <a:extLst>
               <a:ext uri="{FF2B5EF4-FFF2-40B4-BE49-F238E27FC236}">
-                <a16:creationId xmlns:a16="http://schemas.microsoft.com/office/drawing/2014/main" id="{43341930-5702-D0AA-76C2-D18310E99009}"/>
+                <a16:creationId xmlns:a16="http://schemas.microsoft.com/office/drawing/2014/main" id="{5BB0D8B8-70E9-5B9F-0E18-78396D2B7B4C}"/>
               </a:ext>
             </a:extLst>
           </p:cNvPr>
@@ -171,7 +171,7 @@
           <p:cNvPr id="3" name="字幕 2">
             <a:extLst>
               <a:ext uri="{FF2B5EF4-FFF2-40B4-BE49-F238E27FC236}">
-                <a16:creationId xmlns:a16="http://schemas.microsoft.com/office/drawing/2014/main" id="{41BDBCF7-666A-A106-B19C-81C6608E99D1}"/>
+                <a16:creationId xmlns:a16="http://schemas.microsoft.com/office/drawing/2014/main" id="{141C4C90-C439-FAFB-7C48-6D22B3085B2D}"/>
               </a:ext>
             </a:extLst>
           </p:cNvPr>
@@ -241,7 +241,7 @@
           <p:cNvPr id="4" name="日付プレースホルダー 3">
             <a:extLst>
               <a:ext uri="{FF2B5EF4-FFF2-40B4-BE49-F238E27FC236}">
-                <a16:creationId xmlns:a16="http://schemas.microsoft.com/office/drawing/2014/main" id="{6737BF47-4D78-1BA2-3163-CC1B37B0F1F0}"/>
+                <a16:creationId xmlns:a16="http://schemas.microsoft.com/office/drawing/2014/main" id="{4AFC2664-FBA3-BB0D-A6EB-057C7D9036B6}"/>
               </a:ext>
             </a:extLst>
           </p:cNvPr>
@@ -257,7 +257,7 @@
           <a:bodyPr/>
           <a:lstStyle/>
           <a:p>
-            <a:fld id="{0CC69AB9-86F8-43DB-9518-245AE0E3274F}" type="datetimeFigureOut">
+            <a:fld id="{32D09CEE-BE54-46EB-BBA5-D975FC1462A2}" type="datetimeFigureOut">
               <a:rPr kumimoji="1" lang="ja-JP" altLang="en-US" smtClean="0"/>
               <a:t>2026/7/30</a:t>
             </a:fld>
@@ -270,7 +270,7 @@
           <p:cNvPr id="5" name="フッター プレースホルダー 4">
             <a:extLst>
               <a:ext uri="{FF2B5EF4-FFF2-40B4-BE49-F238E27FC236}">
-                <a16:creationId xmlns:a16="http://schemas.microsoft.com/office/drawing/2014/main" id="{7D42B72D-56D2-94DA-BCC8-2945FC871620}"/>
+                <a16:creationId xmlns:a16="http://schemas.microsoft.com/office/drawing/2014/main" id="{B0F3B4DC-D8C0-E169-3B99-485A203AB903}"/>
               </a:ext>
             </a:extLst>
           </p:cNvPr>
@@ -295,7 +295,7 @@
           <p:cNvPr id="6" name="スライド番号プレースホルダー 5">
             <a:extLst>
               <a:ext uri="{FF2B5EF4-FFF2-40B4-BE49-F238E27FC236}">
-                <a16:creationId xmlns:a16="http://schemas.microsoft.com/office/drawing/2014/main" id="{4C526E6E-535A-FDAE-E7E4-7AC5F986B3B1}"/>
+                <a16:creationId xmlns:a16="http://schemas.microsoft.com/office/drawing/2014/main" id="{083D433D-8818-BF54-CD20-3B364F1CD072}"/>
               </a:ext>
             </a:extLst>
           </p:cNvPr>
@@ -311,7 +311,7 @@
           <a:bodyPr/>
           <a:lstStyle/>
           <a:p>
-            <a:fld id="{A4834A61-69C2-4F01-9D68-734E01FF19CE}" type="slidenum">
+            <a:fld id="{49A00542-BBCF-43CE-8735-71EB870E2A16}" type="slidenum">
               <a:rPr kumimoji="1" lang="ja-JP" altLang="en-US" smtClean="0"/>
               <a:t>‹#›</a:t>
             </a:fld>
@@ -322,7 +322,7 @@
     </p:spTree>
     <p:extLst>
       <p:ext uri="{BB962C8B-B14F-4D97-AF65-F5344CB8AC3E}">
-        <p14:creationId xmlns:p14="http://schemas.microsoft.com/office/powerpoint/2010/main" val="2207554556"/>
+        <p14:creationId xmlns:p14="http://schemas.microsoft.com/office/powerpoint/2010/main" val="3180160921"/>
       </p:ext>
     </p:extLst>
   </p:cSld>
@@ -354,7 +354,7 @@
           <p:cNvPr id="2" name="タイトル 1">
             <a:extLst>
               <a:ext uri="{FF2B5EF4-FFF2-40B4-BE49-F238E27FC236}">
-                <a16:creationId xmlns:a16="http://schemas.microsoft.com/office/drawing/2014/main" id="{E9AB2262-3487-63D3-941D-799A9F0374F4}"/>
+                <a16:creationId xmlns:a16="http://schemas.microsoft.com/office/drawing/2014/main" id="{5DF4EBF1-D569-858C-A7E6-537929D2CCC5}"/>
               </a:ext>
             </a:extLst>
           </p:cNvPr>
@@ -382,7 +382,7 @@
           <p:cNvPr id="3" name="縦書きテキスト プレースホルダー 2">
             <a:extLst>
               <a:ext uri="{FF2B5EF4-FFF2-40B4-BE49-F238E27FC236}">
-                <a16:creationId xmlns:a16="http://schemas.microsoft.com/office/drawing/2014/main" id="{CAE96EAA-74CD-AB81-3F53-44B38F0B8921}"/>
+                <a16:creationId xmlns:a16="http://schemas.microsoft.com/office/drawing/2014/main" id="{FEECD424-9849-84A8-CE24-8502DE917692}"/>
               </a:ext>
             </a:extLst>
           </p:cNvPr>
@@ -471,7 +471,7 @@
           <p:cNvPr id="4" name="日付プレースホルダー 3">
             <a:extLst>
               <a:ext uri="{FF2B5EF4-FFF2-40B4-BE49-F238E27FC236}">
-                <a16:creationId xmlns:a16="http://schemas.microsoft.com/office/drawing/2014/main" id="{EB5EC964-D26F-55B6-BADE-B76CD04AC4DA}"/>
+                <a16:creationId xmlns:a16="http://schemas.microsoft.com/office/drawing/2014/main" id="{A8C7A330-EF55-025F-300D-4DD48C8A923C}"/>
               </a:ext>
             </a:extLst>
           </p:cNvPr>
@@ -487,7 +487,7 @@
           <a:bodyPr/>
           <a:lstStyle/>
           <a:p>
-            <a:fld id="{0CC69AB9-86F8-43DB-9518-245AE0E3274F}" type="datetimeFigureOut">
+            <a:fld id="{32D09CEE-BE54-46EB-BBA5-D975FC1462A2}" type="datetimeFigureOut">
               <a:rPr kumimoji="1" lang="ja-JP" altLang="en-US" smtClean="0"/>
               <a:t>2026/7/30</a:t>
             </a:fld>
@@ -500,7 +500,7 @@
           <p:cNvPr id="5" name="フッター プレースホルダー 4">
             <a:extLst>
               <a:ext uri="{FF2B5EF4-FFF2-40B4-BE49-F238E27FC236}">
-                <a16:creationId xmlns:a16="http://schemas.microsoft.com/office/drawing/2014/main" id="{40182E8E-3C75-DBAB-93A4-92DF657E01FC}"/>
+                <a16:creationId xmlns:a16="http://schemas.microsoft.com/office/drawing/2014/main" id="{B69E61F9-A37A-F386-F467-B171E74D84CA}"/>
               </a:ext>
             </a:extLst>
           </p:cNvPr>
@@ -525,7 +525,7 @@
           <p:cNvPr id="6" name="スライド番号プレースホルダー 5">
             <a:extLst>
               <a:ext uri="{FF2B5EF4-FFF2-40B4-BE49-F238E27FC236}">
-                <a16:creationId xmlns:a16="http://schemas.microsoft.com/office/drawing/2014/main" id="{53C3782B-E64A-0D95-74B0-31BA48A8C7E1}"/>
+                <a16:creationId xmlns:a16="http://schemas.microsoft.com/office/drawing/2014/main" id="{91E3003C-5FBA-1D42-AAE5-A4BA075B894E}"/>
               </a:ext>
             </a:extLst>
           </p:cNvPr>
@@ -541,7 +541,7 @@
           <a:bodyPr/>
           <a:lstStyle/>
           <a:p>
-            <a:fld id="{A4834A61-69C2-4F01-9D68-734E01FF19CE}" type="slidenum">
+            <a:fld id="{49A00542-BBCF-43CE-8735-71EB870E2A16}" type="slidenum">
               <a:rPr kumimoji="1" lang="ja-JP" altLang="en-US" smtClean="0"/>
               <a:t>‹#›</a:t>
             </a:fld>
@@ -552,7 +552,7 @@
     </p:spTree>
     <p:extLst>
       <p:ext uri="{BB962C8B-B14F-4D97-AF65-F5344CB8AC3E}">
-        <p14:creationId xmlns:p14="http://schemas.microsoft.com/office/powerpoint/2010/main" val="1630513962"/>
+        <p14:creationId xmlns:p14="http://schemas.microsoft.com/office/powerpoint/2010/main" val="1263392288"/>
       </p:ext>
     </p:extLst>
   </p:cSld>
@@ -584,7 +584,7 @@
           <p:cNvPr id="2" name="縦書きタイトル 1">
             <a:extLst>
               <a:ext uri="{FF2B5EF4-FFF2-40B4-BE49-F238E27FC236}">
-                <a16:creationId xmlns:a16="http://schemas.microsoft.com/office/drawing/2014/main" id="{45208EEC-AD0F-B64D-2FBE-FA9DDE28ACBC}"/>
+                <a16:creationId xmlns:a16="http://schemas.microsoft.com/office/drawing/2014/main" id="{F2EA38E3-92A5-4A56-8D3F-02F55882403A}"/>
               </a:ext>
             </a:extLst>
           </p:cNvPr>
@@ -617,7 +617,7 @@
           <p:cNvPr id="3" name="縦書きテキスト プレースホルダー 2">
             <a:extLst>
               <a:ext uri="{FF2B5EF4-FFF2-40B4-BE49-F238E27FC236}">
-                <a16:creationId xmlns:a16="http://schemas.microsoft.com/office/drawing/2014/main" id="{C9348AA3-90C3-77F9-89DA-7D52A6352F77}"/>
+                <a16:creationId xmlns:a16="http://schemas.microsoft.com/office/drawing/2014/main" id="{0C04A2DE-881B-0E19-517F-BEF602A04076}"/>
               </a:ext>
             </a:extLst>
           </p:cNvPr>
@@ -711,7 +711,7 @@
           <p:cNvPr id="4" name="日付プレースホルダー 3">
             <a:extLst>
               <a:ext uri="{FF2B5EF4-FFF2-40B4-BE49-F238E27FC236}">
-                <a16:creationId xmlns:a16="http://schemas.microsoft.com/office/drawing/2014/main" id="{0EB2DC34-ABC7-610C-4F2E-A5F4DEEC6A29}"/>
+                <a16:creationId xmlns:a16="http://schemas.microsoft.com/office/drawing/2014/main" id="{3EAC3159-3A64-A24F-0AC7-8C4F706EAC19}"/>
               </a:ext>
             </a:extLst>
           </p:cNvPr>
@@ -727,7 +727,7 @@
           <a:bodyPr/>
           <a:lstStyle/>
           <a:p>
-            <a:fld id="{0CC69AB9-86F8-43DB-9518-245AE0E3274F}" type="datetimeFigureOut">
+            <a:fld id="{32D09CEE-BE54-46EB-BBA5-D975FC1462A2}" type="datetimeFigureOut">
               <a:rPr kumimoji="1" lang="ja-JP" altLang="en-US" smtClean="0"/>
               <a:t>2026/7/30</a:t>
             </a:fld>
@@ -740,7 +740,7 @@
           <p:cNvPr id="5" name="フッター プレースホルダー 4">
             <a:extLst>
               <a:ext uri="{FF2B5EF4-FFF2-40B4-BE49-F238E27FC236}">
-                <a16:creationId xmlns:a16="http://schemas.microsoft.com/office/drawing/2014/main" id="{5525258F-FE12-F993-AEFB-0FE576801536}"/>
+                <a16:creationId xmlns:a16="http://schemas.microsoft.com/office/drawing/2014/main" id="{740EE5C1-F22F-143C-0F24-5447327F9BE3}"/>
               </a:ext>
             </a:extLst>
           </p:cNvPr>
@@ -765,7 +765,7 @@
           <p:cNvPr id="6" name="スライド番号プレースホルダー 5">
             <a:extLst>
               <a:ext uri="{FF2B5EF4-FFF2-40B4-BE49-F238E27FC236}">
-                <a16:creationId xmlns:a16="http://schemas.microsoft.com/office/drawing/2014/main" id="{CA5EE26F-2DD3-6BCA-E98E-6FD7E07D7F22}"/>
+                <a16:creationId xmlns:a16="http://schemas.microsoft.com/office/drawing/2014/main" id="{39C78A96-BA9A-C3C2-CAB0-6EBC1FD5B438}"/>
               </a:ext>
             </a:extLst>
           </p:cNvPr>
@@ -781,7 +781,7 @@
           <a:bodyPr/>
           <a:lstStyle/>
           <a:p>
-            <a:fld id="{A4834A61-69C2-4F01-9D68-734E01FF19CE}" type="slidenum">
+            <a:fld id="{49A00542-BBCF-43CE-8735-71EB870E2A16}" type="slidenum">
               <a:rPr kumimoji="1" lang="ja-JP" altLang="en-US" smtClean="0"/>
               <a:t>‹#›</a:t>
             </a:fld>
@@ -792,7 +792,7 @@
     </p:spTree>
     <p:extLst>
       <p:ext uri="{BB962C8B-B14F-4D97-AF65-F5344CB8AC3E}">
-        <p14:creationId xmlns:p14="http://schemas.microsoft.com/office/powerpoint/2010/main" val="2656707670"/>
+        <p14:creationId xmlns:p14="http://schemas.microsoft.com/office/powerpoint/2010/main" val="1589949375"/>
       </p:ext>
     </p:extLst>
   </p:cSld>
@@ -824,7 +824,7 @@
           <p:cNvPr id="2" name="タイトル 1">
             <a:extLst>
               <a:ext uri="{FF2B5EF4-FFF2-40B4-BE49-F238E27FC236}">
-                <a16:creationId xmlns:a16="http://schemas.microsoft.com/office/drawing/2014/main" id="{9290A52C-8266-E03E-16FF-D679FA67B920}"/>
+                <a16:creationId xmlns:a16="http://schemas.microsoft.com/office/drawing/2014/main" id="{FAC1D758-6FF0-3F05-97F6-AF98BDBCDADB}"/>
               </a:ext>
             </a:extLst>
           </p:cNvPr>
@@ -852,7 +852,7 @@
           <p:cNvPr id="3" name="コンテンツ プレースホルダー 2">
             <a:extLst>
               <a:ext uri="{FF2B5EF4-FFF2-40B4-BE49-F238E27FC236}">
-                <a16:creationId xmlns:a16="http://schemas.microsoft.com/office/drawing/2014/main" id="{E97356CF-F452-5AFF-569B-C4AE411FFB74}"/>
+                <a16:creationId xmlns:a16="http://schemas.microsoft.com/office/drawing/2014/main" id="{5697BF66-2B4D-C87D-11BE-0ED30F91F5B0}"/>
               </a:ext>
             </a:extLst>
           </p:cNvPr>
@@ -941,7 +941,7 @@
           <p:cNvPr id="4" name="日付プレースホルダー 3">
             <a:extLst>
               <a:ext uri="{FF2B5EF4-FFF2-40B4-BE49-F238E27FC236}">
-                <a16:creationId xmlns:a16="http://schemas.microsoft.com/office/drawing/2014/main" id="{AB65C677-839E-9D6D-2214-B26AC60601FF}"/>
+                <a16:creationId xmlns:a16="http://schemas.microsoft.com/office/drawing/2014/main" id="{885F1171-1903-056A-6484-904B956EC701}"/>
               </a:ext>
             </a:extLst>
           </p:cNvPr>
@@ -957,7 +957,7 @@
           <a:bodyPr/>
           <a:lstStyle/>
           <a:p>
-            <a:fld id="{0CC69AB9-86F8-43DB-9518-245AE0E3274F}" type="datetimeFigureOut">
+            <a:fld id="{32D09CEE-BE54-46EB-BBA5-D975FC1462A2}" type="datetimeFigureOut">
               <a:rPr kumimoji="1" lang="ja-JP" altLang="en-US" smtClean="0"/>
               <a:t>2026/7/30</a:t>
             </a:fld>
@@ -970,7 +970,7 @@
           <p:cNvPr id="5" name="フッター プレースホルダー 4">
             <a:extLst>
               <a:ext uri="{FF2B5EF4-FFF2-40B4-BE49-F238E27FC236}">
-                <a16:creationId xmlns:a16="http://schemas.microsoft.com/office/drawing/2014/main" id="{8393809B-76CB-0ABB-0854-B613C6D18E55}"/>
+                <a16:creationId xmlns:a16="http://schemas.microsoft.com/office/drawing/2014/main" id="{C650D17B-85F1-B158-5810-8773EF594C91}"/>
               </a:ext>
             </a:extLst>
           </p:cNvPr>
@@ -995,7 +995,7 @@
           <p:cNvPr id="6" name="スライド番号プレースホルダー 5">
             <a:extLst>
               <a:ext uri="{FF2B5EF4-FFF2-40B4-BE49-F238E27FC236}">
-                <a16:creationId xmlns:a16="http://schemas.microsoft.com/office/drawing/2014/main" id="{FBB72899-787B-C204-8A60-ACBA7D0E5A66}"/>
+                <a16:creationId xmlns:a16="http://schemas.microsoft.com/office/drawing/2014/main" id="{32A1EAF9-80AE-63C0-CD2F-485B24A0ACEF}"/>
               </a:ext>
             </a:extLst>
           </p:cNvPr>
@@ -1011,7 +1011,7 @@
           <a:bodyPr/>
           <a:lstStyle/>
           <a:p>
-            <a:fld id="{A4834A61-69C2-4F01-9D68-734E01FF19CE}" type="slidenum">
+            <a:fld id="{49A00542-BBCF-43CE-8735-71EB870E2A16}" type="slidenum">
               <a:rPr kumimoji="1" lang="ja-JP" altLang="en-US" smtClean="0"/>
               <a:t>‹#›</a:t>
             </a:fld>
@@ -1022,7 +1022,7 @@
     </p:spTree>
     <p:extLst>
       <p:ext uri="{BB962C8B-B14F-4D97-AF65-F5344CB8AC3E}">
-        <p14:creationId xmlns:p14="http://schemas.microsoft.com/office/powerpoint/2010/main" val="382538772"/>
+        <p14:creationId xmlns:p14="http://schemas.microsoft.com/office/powerpoint/2010/main" val="209340356"/>
       </p:ext>
     </p:extLst>
   </p:cSld>
@@ -1054,7 +1054,7 @@
           <p:cNvPr id="2" name="タイトル 1">
             <a:extLst>
               <a:ext uri="{FF2B5EF4-FFF2-40B4-BE49-F238E27FC236}">
-                <a16:creationId xmlns:a16="http://schemas.microsoft.com/office/drawing/2014/main" id="{34E39FFB-139E-B772-836A-968775103F19}"/>
+                <a16:creationId xmlns:a16="http://schemas.microsoft.com/office/drawing/2014/main" id="{9E6DE65D-5828-7DA1-4CC1-65A041AC98FF}"/>
               </a:ext>
             </a:extLst>
           </p:cNvPr>
@@ -1091,7 +1091,7 @@
           <p:cNvPr id="3" name="テキスト プレースホルダー 2">
             <a:extLst>
               <a:ext uri="{FF2B5EF4-FFF2-40B4-BE49-F238E27FC236}">
-                <a16:creationId xmlns:a16="http://schemas.microsoft.com/office/drawing/2014/main" id="{180A2706-FF02-3335-BF8E-B0CF33406BCE}"/>
+                <a16:creationId xmlns:a16="http://schemas.microsoft.com/office/drawing/2014/main" id="{D7E8B2CF-02B3-9827-CF86-93DA47869D84}"/>
               </a:ext>
             </a:extLst>
           </p:cNvPr>
@@ -1216,7 +1216,7 @@
           <p:cNvPr id="4" name="日付プレースホルダー 3">
             <a:extLst>
               <a:ext uri="{FF2B5EF4-FFF2-40B4-BE49-F238E27FC236}">
-                <a16:creationId xmlns:a16="http://schemas.microsoft.com/office/drawing/2014/main" id="{2775FFD1-C67C-5919-C8E2-DE907A2DCF01}"/>
+                <a16:creationId xmlns:a16="http://schemas.microsoft.com/office/drawing/2014/main" id="{0D228AF8-B9A6-6815-DA53-47240F1250A5}"/>
               </a:ext>
             </a:extLst>
           </p:cNvPr>
@@ -1232,7 +1232,7 @@
           <a:bodyPr/>
           <a:lstStyle/>
           <a:p>
-            <a:fld id="{0CC69AB9-86F8-43DB-9518-245AE0E3274F}" type="datetimeFigureOut">
+            <a:fld id="{32D09CEE-BE54-46EB-BBA5-D975FC1462A2}" type="datetimeFigureOut">
               <a:rPr kumimoji="1" lang="ja-JP" altLang="en-US" smtClean="0"/>
               <a:t>2026/7/30</a:t>
             </a:fld>
@@ -1245,7 +1245,7 @@
           <p:cNvPr id="5" name="フッター プレースホルダー 4">
             <a:extLst>
               <a:ext uri="{FF2B5EF4-FFF2-40B4-BE49-F238E27FC236}">
-                <a16:creationId xmlns:a16="http://schemas.microsoft.com/office/drawing/2014/main" id="{CC5B9195-7AD9-8AA2-0A8E-102D5D5D5EBE}"/>
+                <a16:creationId xmlns:a16="http://schemas.microsoft.com/office/drawing/2014/main" id="{0AC3EEB3-6EA2-4CC9-C313-2E67C8AC0A4A}"/>
               </a:ext>
             </a:extLst>
           </p:cNvPr>
@@ -1270,7 +1270,7 @@
           <p:cNvPr id="6" name="スライド番号プレースホルダー 5">
             <a:extLst>
               <a:ext uri="{FF2B5EF4-FFF2-40B4-BE49-F238E27FC236}">
-                <a16:creationId xmlns:a16="http://schemas.microsoft.com/office/drawing/2014/main" id="{E438F7A3-C936-8C4C-A36E-CD3784BEA7C6}"/>
+                <a16:creationId xmlns:a16="http://schemas.microsoft.com/office/drawing/2014/main" id="{4657D8C6-2A12-C383-27C3-24C978C0D517}"/>
               </a:ext>
             </a:extLst>
           </p:cNvPr>
@@ -1286,7 +1286,7 @@
           <a:bodyPr/>
           <a:lstStyle/>
           <a:p>
-            <a:fld id="{A4834A61-69C2-4F01-9D68-734E01FF19CE}" type="slidenum">
+            <a:fld id="{49A00542-BBCF-43CE-8735-71EB870E2A16}" type="slidenum">
               <a:rPr kumimoji="1" lang="ja-JP" altLang="en-US" smtClean="0"/>
               <a:t>‹#›</a:t>
             </a:fld>
@@ -1297,7 +1297,7 @@
     </p:spTree>
     <p:extLst>
       <p:ext uri="{BB962C8B-B14F-4D97-AF65-F5344CB8AC3E}">
-        <p14:creationId xmlns:p14="http://schemas.microsoft.com/office/powerpoint/2010/main" val="74543477"/>
+        <p14:creationId xmlns:p14="http://schemas.microsoft.com/office/powerpoint/2010/main" val="3335696405"/>
       </p:ext>
     </p:extLst>
   </p:cSld>
@@ -1329,7 +1329,7 @@
           <p:cNvPr id="2" name="タイトル 1">
             <a:extLst>
               <a:ext uri="{FF2B5EF4-FFF2-40B4-BE49-F238E27FC236}">
-                <a16:creationId xmlns:a16="http://schemas.microsoft.com/office/drawing/2014/main" id="{38DDB5CC-A59C-C801-4BF6-6C685080391A}"/>
+                <a16:creationId xmlns:a16="http://schemas.microsoft.com/office/drawing/2014/main" id="{DB6744D2-D19D-70A2-C92E-5651DD346DE4}"/>
               </a:ext>
             </a:extLst>
           </p:cNvPr>
@@ -1357,7 +1357,7 @@
           <p:cNvPr id="3" name="コンテンツ プレースホルダー 2">
             <a:extLst>
               <a:ext uri="{FF2B5EF4-FFF2-40B4-BE49-F238E27FC236}">
-                <a16:creationId xmlns:a16="http://schemas.microsoft.com/office/drawing/2014/main" id="{6631EEF6-8ABE-18ED-7DEB-436CE3C8DE3C}"/>
+                <a16:creationId xmlns:a16="http://schemas.microsoft.com/office/drawing/2014/main" id="{8EA1818A-7F36-F9E3-E644-82CE77EFD626}"/>
               </a:ext>
             </a:extLst>
           </p:cNvPr>
@@ -1451,7 +1451,7 @@
           <p:cNvPr id="4" name="コンテンツ プレースホルダー 3">
             <a:extLst>
               <a:ext uri="{FF2B5EF4-FFF2-40B4-BE49-F238E27FC236}">
-                <a16:creationId xmlns:a16="http://schemas.microsoft.com/office/drawing/2014/main" id="{2F1B45EF-7AD5-F816-A0C5-E0EC9F6313B3}"/>
+                <a16:creationId xmlns:a16="http://schemas.microsoft.com/office/drawing/2014/main" id="{A1027015-337B-7C8E-0A0D-EFFAD582C2D2}"/>
               </a:ext>
             </a:extLst>
           </p:cNvPr>
@@ -1545,7 +1545,7 @@
           <p:cNvPr id="5" name="日付プレースホルダー 4">
             <a:extLst>
               <a:ext uri="{FF2B5EF4-FFF2-40B4-BE49-F238E27FC236}">
-                <a16:creationId xmlns:a16="http://schemas.microsoft.com/office/drawing/2014/main" id="{D9302E09-1B7A-72DE-C176-39E74808B532}"/>
+                <a16:creationId xmlns:a16="http://schemas.microsoft.com/office/drawing/2014/main" id="{6FFC5D88-D173-C5FD-014A-BFDDCDBDC3F1}"/>
               </a:ext>
             </a:extLst>
           </p:cNvPr>
@@ -1561,7 +1561,7 @@
           <a:bodyPr/>
           <a:lstStyle/>
           <a:p>
-            <a:fld id="{0CC69AB9-86F8-43DB-9518-245AE0E3274F}" type="datetimeFigureOut">
+            <a:fld id="{32D09CEE-BE54-46EB-BBA5-D975FC1462A2}" type="datetimeFigureOut">
               <a:rPr kumimoji="1" lang="ja-JP" altLang="en-US" smtClean="0"/>
               <a:t>2026/7/30</a:t>
             </a:fld>
@@ -1574,7 +1574,7 @@
           <p:cNvPr id="6" name="フッター プレースホルダー 5">
             <a:extLst>
               <a:ext uri="{FF2B5EF4-FFF2-40B4-BE49-F238E27FC236}">
-                <a16:creationId xmlns:a16="http://schemas.microsoft.com/office/drawing/2014/main" id="{46F734D3-A27C-59A3-C839-4466675E8F7C}"/>
+                <a16:creationId xmlns:a16="http://schemas.microsoft.com/office/drawing/2014/main" id="{0EE7C981-1ED9-C07E-F23F-AC6E86C48889}"/>
               </a:ext>
             </a:extLst>
           </p:cNvPr>
@@ -1599,7 +1599,7 @@
           <p:cNvPr id="7" name="スライド番号プレースホルダー 6">
             <a:extLst>
               <a:ext uri="{FF2B5EF4-FFF2-40B4-BE49-F238E27FC236}">
-                <a16:creationId xmlns:a16="http://schemas.microsoft.com/office/drawing/2014/main" id="{CDF23406-1992-6B5C-D617-70E0376A0EA3}"/>
+                <a16:creationId xmlns:a16="http://schemas.microsoft.com/office/drawing/2014/main" id="{C33BF7B1-21CE-C2C9-6C24-B8E96D4B0D6C}"/>
               </a:ext>
             </a:extLst>
           </p:cNvPr>
@@ -1615,7 +1615,7 @@
           <a:bodyPr/>
           <a:lstStyle/>
           <a:p>
-            <a:fld id="{A4834A61-69C2-4F01-9D68-734E01FF19CE}" type="slidenum">
+            <a:fld id="{49A00542-BBCF-43CE-8735-71EB870E2A16}" type="slidenum">
               <a:rPr kumimoji="1" lang="ja-JP" altLang="en-US" smtClean="0"/>
               <a:t>‹#›</a:t>
             </a:fld>
@@ -1626,7 +1626,7 @@
     </p:spTree>
     <p:extLst>
       <p:ext uri="{BB962C8B-B14F-4D97-AF65-F5344CB8AC3E}">
-        <p14:creationId xmlns:p14="http://schemas.microsoft.com/office/powerpoint/2010/main" val="1286302032"/>
+        <p14:creationId xmlns:p14="http://schemas.microsoft.com/office/powerpoint/2010/main" val="251759074"/>
       </p:ext>
     </p:extLst>
   </p:cSld>
@@ -1658,7 +1658,7 @@
           <p:cNvPr id="2" name="タイトル 1">
             <a:extLst>
               <a:ext uri="{FF2B5EF4-FFF2-40B4-BE49-F238E27FC236}">
-                <a16:creationId xmlns:a16="http://schemas.microsoft.com/office/drawing/2014/main" id="{4CE29836-6F6A-E6C2-8776-013E88AA78C7}"/>
+                <a16:creationId xmlns:a16="http://schemas.microsoft.com/office/drawing/2014/main" id="{B1463DFA-1D82-2545-30DB-43229075BE7F}"/>
               </a:ext>
             </a:extLst>
           </p:cNvPr>
@@ -1691,7 +1691,7 @@
           <p:cNvPr id="3" name="テキスト プレースホルダー 2">
             <a:extLst>
               <a:ext uri="{FF2B5EF4-FFF2-40B4-BE49-F238E27FC236}">
-                <a16:creationId xmlns:a16="http://schemas.microsoft.com/office/drawing/2014/main" id="{C2A0BDBD-E3FB-FF35-CE19-07594DA1177E}"/>
+                <a16:creationId xmlns:a16="http://schemas.microsoft.com/office/drawing/2014/main" id="{BB6B31FF-35F5-FFAD-997E-4E10220334CD}"/>
               </a:ext>
             </a:extLst>
           </p:cNvPr>
@@ -1762,7 +1762,7 @@
           <p:cNvPr id="4" name="コンテンツ プレースホルダー 3">
             <a:extLst>
               <a:ext uri="{FF2B5EF4-FFF2-40B4-BE49-F238E27FC236}">
-                <a16:creationId xmlns:a16="http://schemas.microsoft.com/office/drawing/2014/main" id="{E657FCC5-47A6-ADF9-5AC0-78F56EFFCF32}"/>
+                <a16:creationId xmlns:a16="http://schemas.microsoft.com/office/drawing/2014/main" id="{5E93E96E-DBB8-C5D3-75E9-6A9716555599}"/>
               </a:ext>
             </a:extLst>
           </p:cNvPr>
@@ -1856,7 +1856,7 @@
           <p:cNvPr id="5" name="テキスト プレースホルダー 4">
             <a:extLst>
               <a:ext uri="{FF2B5EF4-FFF2-40B4-BE49-F238E27FC236}">
-                <a16:creationId xmlns:a16="http://schemas.microsoft.com/office/drawing/2014/main" id="{3FCF982D-6C06-6826-4E41-18AB64A9732D}"/>
+                <a16:creationId xmlns:a16="http://schemas.microsoft.com/office/drawing/2014/main" id="{417D4CF3-9C19-7AC8-ED71-CCA9A63DFA43}"/>
               </a:ext>
             </a:extLst>
           </p:cNvPr>
@@ -1927,7 +1927,7 @@
           <p:cNvPr id="6" name="コンテンツ プレースホルダー 5">
             <a:extLst>
               <a:ext uri="{FF2B5EF4-FFF2-40B4-BE49-F238E27FC236}">
-                <a16:creationId xmlns:a16="http://schemas.microsoft.com/office/drawing/2014/main" id="{AA37AFE4-D626-7908-55CD-8CBBD16834AF}"/>
+                <a16:creationId xmlns:a16="http://schemas.microsoft.com/office/drawing/2014/main" id="{106B997F-AF58-9996-961C-8F48701AAFEA}"/>
               </a:ext>
             </a:extLst>
           </p:cNvPr>
@@ -2021,7 +2021,7 @@
           <p:cNvPr id="7" name="日付プレースホルダー 6">
             <a:extLst>
               <a:ext uri="{FF2B5EF4-FFF2-40B4-BE49-F238E27FC236}">
-                <a16:creationId xmlns:a16="http://schemas.microsoft.com/office/drawing/2014/main" id="{50E8F131-A70B-283C-6CCC-80DD0D52CD96}"/>
+                <a16:creationId xmlns:a16="http://schemas.microsoft.com/office/drawing/2014/main" id="{E010632B-73E0-394A-392A-411E39B2C723}"/>
               </a:ext>
             </a:extLst>
           </p:cNvPr>
@@ -2037,7 +2037,7 @@
           <a:bodyPr/>
           <a:lstStyle/>
           <a:p>
-            <a:fld id="{0CC69AB9-86F8-43DB-9518-245AE0E3274F}" type="datetimeFigureOut">
+            <a:fld id="{32D09CEE-BE54-46EB-BBA5-D975FC1462A2}" type="datetimeFigureOut">
               <a:rPr kumimoji="1" lang="ja-JP" altLang="en-US" smtClean="0"/>
               <a:t>2026/7/30</a:t>
             </a:fld>
@@ -2050,7 +2050,7 @@
           <p:cNvPr id="8" name="フッター プレースホルダー 7">
             <a:extLst>
               <a:ext uri="{FF2B5EF4-FFF2-40B4-BE49-F238E27FC236}">
-                <a16:creationId xmlns:a16="http://schemas.microsoft.com/office/drawing/2014/main" id="{5E55B3D3-83EF-95E0-90BD-AF33DE465875}"/>
+                <a16:creationId xmlns:a16="http://schemas.microsoft.com/office/drawing/2014/main" id="{62810516-DDB9-2834-208F-01B8AB636BD8}"/>
               </a:ext>
             </a:extLst>
           </p:cNvPr>
@@ -2075,7 +2075,7 @@
           <p:cNvPr id="9" name="スライド番号プレースホルダー 8">
             <a:extLst>
               <a:ext uri="{FF2B5EF4-FFF2-40B4-BE49-F238E27FC236}">
-                <a16:creationId xmlns:a16="http://schemas.microsoft.com/office/drawing/2014/main" id="{61C51A46-4A56-F1FE-EA28-875F55FFC249}"/>
+                <a16:creationId xmlns:a16="http://schemas.microsoft.com/office/drawing/2014/main" id="{CDEA9B6B-E86D-C123-4C73-0A05BEB5E0B0}"/>
               </a:ext>
             </a:extLst>
           </p:cNvPr>
@@ -2091,7 +2091,7 @@
           <a:bodyPr/>
           <a:lstStyle/>
           <a:p>
-            <a:fld id="{A4834A61-69C2-4F01-9D68-734E01FF19CE}" type="slidenum">
+            <a:fld id="{49A00542-BBCF-43CE-8735-71EB870E2A16}" type="slidenum">
               <a:rPr kumimoji="1" lang="ja-JP" altLang="en-US" smtClean="0"/>
               <a:t>‹#›</a:t>
             </a:fld>
@@ -2102,7 +2102,7 @@
     </p:spTree>
     <p:extLst>
       <p:ext uri="{BB962C8B-B14F-4D97-AF65-F5344CB8AC3E}">
-        <p14:creationId xmlns:p14="http://schemas.microsoft.com/office/powerpoint/2010/main" val="3719527315"/>
+        <p14:creationId xmlns:p14="http://schemas.microsoft.com/office/powerpoint/2010/main" val="3651096990"/>
       </p:ext>
     </p:extLst>
   </p:cSld>
@@ -2134,7 +2134,7 @@
           <p:cNvPr id="2" name="タイトル 1">
             <a:extLst>
               <a:ext uri="{FF2B5EF4-FFF2-40B4-BE49-F238E27FC236}">
-                <a16:creationId xmlns:a16="http://schemas.microsoft.com/office/drawing/2014/main" id="{6E0FC1A4-DC21-2178-8D23-AFDF676831B0}"/>
+                <a16:creationId xmlns:a16="http://schemas.microsoft.com/office/drawing/2014/main" id="{BDD7064C-6101-772E-1246-51FE054367F6}"/>
               </a:ext>
             </a:extLst>
           </p:cNvPr>
@@ -2162,7 +2162,7 @@
           <p:cNvPr id="3" name="日付プレースホルダー 2">
             <a:extLst>
               <a:ext uri="{FF2B5EF4-FFF2-40B4-BE49-F238E27FC236}">
-                <a16:creationId xmlns:a16="http://schemas.microsoft.com/office/drawing/2014/main" id="{258F4D9D-998C-1506-A9B3-05E89D328C47}"/>
+                <a16:creationId xmlns:a16="http://schemas.microsoft.com/office/drawing/2014/main" id="{0234A7AA-F224-ECC2-2160-8FB2FBE71D98}"/>
               </a:ext>
             </a:extLst>
           </p:cNvPr>
@@ -2178,7 +2178,7 @@
           <a:bodyPr/>
           <a:lstStyle/>
           <a:p>
-            <a:fld id="{0CC69AB9-86F8-43DB-9518-245AE0E3274F}" type="datetimeFigureOut">
+            <a:fld id="{32D09CEE-BE54-46EB-BBA5-D975FC1462A2}" type="datetimeFigureOut">
               <a:rPr kumimoji="1" lang="ja-JP" altLang="en-US" smtClean="0"/>
               <a:t>2026/7/30</a:t>
             </a:fld>
@@ -2191,7 +2191,7 @@
           <p:cNvPr id="4" name="フッター プレースホルダー 3">
             <a:extLst>
               <a:ext uri="{FF2B5EF4-FFF2-40B4-BE49-F238E27FC236}">
-                <a16:creationId xmlns:a16="http://schemas.microsoft.com/office/drawing/2014/main" id="{57D86BCE-DCD7-565F-F9AA-634E704C4A47}"/>
+                <a16:creationId xmlns:a16="http://schemas.microsoft.com/office/drawing/2014/main" id="{4653D8BF-9B24-06C3-3797-17BBA7534076}"/>
               </a:ext>
             </a:extLst>
           </p:cNvPr>
@@ -2216,7 +2216,7 @@
           <p:cNvPr id="5" name="スライド番号プレースホルダー 4">
             <a:extLst>
               <a:ext uri="{FF2B5EF4-FFF2-40B4-BE49-F238E27FC236}">
-                <a16:creationId xmlns:a16="http://schemas.microsoft.com/office/drawing/2014/main" id="{0DA11611-6E9B-BB43-4F03-16157FA19F4E}"/>
+                <a16:creationId xmlns:a16="http://schemas.microsoft.com/office/drawing/2014/main" id="{132B22C5-3F78-0950-055C-E0E9C8796043}"/>
               </a:ext>
             </a:extLst>
           </p:cNvPr>
@@ -2232,7 +2232,7 @@
           <a:bodyPr/>
           <a:lstStyle/>
           <a:p>
-            <a:fld id="{A4834A61-69C2-4F01-9D68-734E01FF19CE}" type="slidenum">
+            <a:fld id="{49A00542-BBCF-43CE-8735-71EB870E2A16}" type="slidenum">
               <a:rPr kumimoji="1" lang="ja-JP" altLang="en-US" smtClean="0"/>
               <a:t>‹#›</a:t>
             </a:fld>
@@ -2243,7 +2243,7 @@
     </p:spTree>
     <p:extLst>
       <p:ext uri="{BB962C8B-B14F-4D97-AF65-F5344CB8AC3E}">
-        <p14:creationId xmlns:p14="http://schemas.microsoft.com/office/powerpoint/2010/main" val="4207927628"/>
+        <p14:creationId xmlns:p14="http://schemas.microsoft.com/office/powerpoint/2010/main" val="2096189542"/>
       </p:ext>
     </p:extLst>
   </p:cSld>
@@ -2275,7 +2275,7 @@
           <p:cNvPr id="2" name="日付プレースホルダー 1">
             <a:extLst>
               <a:ext uri="{FF2B5EF4-FFF2-40B4-BE49-F238E27FC236}">
-                <a16:creationId xmlns:a16="http://schemas.microsoft.com/office/drawing/2014/main" id="{15F60708-AE08-55C5-3BA0-0A9D713297E3}"/>
+                <a16:creationId xmlns:a16="http://schemas.microsoft.com/office/drawing/2014/main" id="{9FBD10B8-D555-D8D2-7EC2-12BBDD9A34B7}"/>
               </a:ext>
             </a:extLst>
           </p:cNvPr>
@@ -2291,7 +2291,7 @@
           <a:bodyPr/>
           <a:lstStyle/>
           <a:p>
-            <a:fld id="{0CC69AB9-86F8-43DB-9518-245AE0E3274F}" type="datetimeFigureOut">
+            <a:fld id="{32D09CEE-BE54-46EB-BBA5-D975FC1462A2}" type="datetimeFigureOut">
               <a:rPr kumimoji="1" lang="ja-JP" altLang="en-US" smtClean="0"/>
               <a:t>2026/7/30</a:t>
             </a:fld>
@@ -2304,7 +2304,7 @@
           <p:cNvPr id="3" name="フッター プレースホルダー 2">
             <a:extLst>
               <a:ext uri="{FF2B5EF4-FFF2-40B4-BE49-F238E27FC236}">
-                <a16:creationId xmlns:a16="http://schemas.microsoft.com/office/drawing/2014/main" id="{13DF4BEB-6CDD-7A1A-DA73-FD89B7625779}"/>
+                <a16:creationId xmlns:a16="http://schemas.microsoft.com/office/drawing/2014/main" id="{368591FA-81EF-28CE-C214-38DE6D181F29}"/>
               </a:ext>
             </a:extLst>
           </p:cNvPr>
@@ -2329,7 +2329,7 @@
           <p:cNvPr id="4" name="スライド番号プレースホルダー 3">
             <a:extLst>
               <a:ext uri="{FF2B5EF4-FFF2-40B4-BE49-F238E27FC236}">
-                <a16:creationId xmlns:a16="http://schemas.microsoft.com/office/drawing/2014/main" id="{CC6BCD70-F380-F123-544D-0BD5ABB5F5FC}"/>
+                <a16:creationId xmlns:a16="http://schemas.microsoft.com/office/drawing/2014/main" id="{934D83EB-7303-AAD4-EE73-C8210F7DB4D6}"/>
               </a:ext>
             </a:extLst>
           </p:cNvPr>
@@ -2345,7 +2345,7 @@
           <a:bodyPr/>
           <a:lstStyle/>
           <a:p>
-            <a:fld id="{A4834A61-69C2-4F01-9D68-734E01FF19CE}" type="slidenum">
+            <a:fld id="{49A00542-BBCF-43CE-8735-71EB870E2A16}" type="slidenum">
               <a:rPr kumimoji="1" lang="ja-JP" altLang="en-US" smtClean="0"/>
               <a:t>‹#›</a:t>
             </a:fld>
@@ -2356,7 +2356,7 @@
     </p:spTree>
     <p:extLst>
       <p:ext uri="{BB962C8B-B14F-4D97-AF65-F5344CB8AC3E}">
-        <p14:creationId xmlns:p14="http://schemas.microsoft.com/office/powerpoint/2010/main" val="631081128"/>
+        <p14:creationId xmlns:p14="http://schemas.microsoft.com/office/powerpoint/2010/main" val="1307487839"/>
       </p:ext>
     </p:extLst>
   </p:cSld>
@@ -2388,7 +2388,7 @@
           <p:cNvPr id="2" name="タイトル 1">
             <a:extLst>
               <a:ext uri="{FF2B5EF4-FFF2-40B4-BE49-F238E27FC236}">
-                <a16:creationId xmlns:a16="http://schemas.microsoft.com/office/drawing/2014/main" id="{884D8C49-AE87-93CE-AE1F-8A0D48483858}"/>
+                <a16:creationId xmlns:a16="http://schemas.microsoft.com/office/drawing/2014/main" id="{F63D42DA-A76A-655D-2857-B2DF86254EB2}"/>
               </a:ext>
             </a:extLst>
           </p:cNvPr>
@@ -2425,7 +2425,7 @@
           <p:cNvPr id="3" name="コンテンツ プレースホルダー 2">
             <a:extLst>
               <a:ext uri="{FF2B5EF4-FFF2-40B4-BE49-F238E27FC236}">
-                <a16:creationId xmlns:a16="http://schemas.microsoft.com/office/drawing/2014/main" id="{C1494BA9-CE85-AF1B-FC0A-1A52602FC482}"/>
+                <a16:creationId xmlns:a16="http://schemas.microsoft.com/office/drawing/2014/main" id="{73E5825A-1DA9-3360-DC8B-9609843AC657}"/>
               </a:ext>
             </a:extLst>
           </p:cNvPr>
@@ -2547,7 +2547,7 @@
           <p:cNvPr id="4" name="テキスト プレースホルダー 3">
             <a:extLst>
               <a:ext uri="{FF2B5EF4-FFF2-40B4-BE49-F238E27FC236}">
-                <a16:creationId xmlns:a16="http://schemas.microsoft.com/office/drawing/2014/main" id="{253D7CE2-5487-776B-E7DF-5FDBACF7DC87}"/>
+                <a16:creationId xmlns:a16="http://schemas.microsoft.com/office/drawing/2014/main" id="{3D803CD7-2AEC-6F5A-EB95-7B0F9CCB1EFA}"/>
               </a:ext>
             </a:extLst>
           </p:cNvPr>
@@ -2618,7 +2618,7 @@
           <p:cNvPr id="5" name="日付プレースホルダー 4">
             <a:extLst>
               <a:ext uri="{FF2B5EF4-FFF2-40B4-BE49-F238E27FC236}">
-                <a16:creationId xmlns:a16="http://schemas.microsoft.com/office/drawing/2014/main" id="{CB4E2C1A-5591-7A21-959F-A51A4957D3D7}"/>
+                <a16:creationId xmlns:a16="http://schemas.microsoft.com/office/drawing/2014/main" id="{BFB3E8E3-67DF-F841-A257-4BA196795E9B}"/>
               </a:ext>
             </a:extLst>
           </p:cNvPr>
@@ -2634,7 +2634,7 @@
           <a:bodyPr/>
           <a:lstStyle/>
           <a:p>
-            <a:fld id="{0CC69AB9-86F8-43DB-9518-245AE0E3274F}" type="datetimeFigureOut">
+            <a:fld id="{32D09CEE-BE54-46EB-BBA5-D975FC1462A2}" type="datetimeFigureOut">
               <a:rPr kumimoji="1" lang="ja-JP" altLang="en-US" smtClean="0"/>
               <a:t>2026/7/30</a:t>
             </a:fld>
@@ -2647,7 +2647,7 @@
           <p:cNvPr id="6" name="フッター プレースホルダー 5">
             <a:extLst>
               <a:ext uri="{FF2B5EF4-FFF2-40B4-BE49-F238E27FC236}">
-                <a16:creationId xmlns:a16="http://schemas.microsoft.com/office/drawing/2014/main" id="{5AA787C6-86D1-184C-CB99-D72605579744}"/>
+                <a16:creationId xmlns:a16="http://schemas.microsoft.com/office/drawing/2014/main" id="{DC90A533-B4F8-EC3B-C4EB-A9AEF6AC6A8E}"/>
               </a:ext>
             </a:extLst>
           </p:cNvPr>
@@ -2672,7 +2672,7 @@
           <p:cNvPr id="7" name="スライド番号プレースホルダー 6">
             <a:extLst>
               <a:ext uri="{FF2B5EF4-FFF2-40B4-BE49-F238E27FC236}">
-                <a16:creationId xmlns:a16="http://schemas.microsoft.com/office/drawing/2014/main" id="{9839C96C-59D0-8DAC-087A-E52C55E6EB41}"/>
+                <a16:creationId xmlns:a16="http://schemas.microsoft.com/office/drawing/2014/main" id="{5CE24EC8-2D51-EA1C-12DA-2FD720BB84C5}"/>
               </a:ext>
             </a:extLst>
           </p:cNvPr>
@@ -2688,7 +2688,7 @@
           <a:bodyPr/>
           <a:lstStyle/>
           <a:p>
-            <a:fld id="{A4834A61-69C2-4F01-9D68-734E01FF19CE}" type="slidenum">
+            <a:fld id="{49A00542-BBCF-43CE-8735-71EB870E2A16}" type="slidenum">
               <a:rPr kumimoji="1" lang="ja-JP" altLang="en-US" smtClean="0"/>
               <a:t>‹#›</a:t>
             </a:fld>
@@ -2699,7 +2699,7 @@
     </p:spTree>
     <p:extLst>
       <p:ext uri="{BB962C8B-B14F-4D97-AF65-F5344CB8AC3E}">
-        <p14:creationId xmlns:p14="http://schemas.microsoft.com/office/powerpoint/2010/main" val="1844887654"/>
+        <p14:creationId xmlns:p14="http://schemas.microsoft.com/office/powerpoint/2010/main" val="4073079233"/>
       </p:ext>
     </p:extLst>
   </p:cSld>
@@ -2731,7 +2731,7 @@
           <p:cNvPr id="2" name="タイトル 1">
             <a:extLst>
               <a:ext uri="{FF2B5EF4-FFF2-40B4-BE49-F238E27FC236}">
-                <a16:creationId xmlns:a16="http://schemas.microsoft.com/office/drawing/2014/main" id="{C123F257-1001-6B9B-8658-F779023E0F77}"/>
+                <a16:creationId xmlns:a16="http://schemas.microsoft.com/office/drawing/2014/main" id="{9D5753A2-8B65-C56C-0D64-89D9AD693A19}"/>
               </a:ext>
             </a:extLst>
           </p:cNvPr>
@@ -2768,7 +2768,7 @@
           <p:cNvPr id="3" name="図プレースホルダー 2">
             <a:extLst>
               <a:ext uri="{FF2B5EF4-FFF2-40B4-BE49-F238E27FC236}">
-                <a16:creationId xmlns:a16="http://schemas.microsoft.com/office/drawing/2014/main" id="{A4943F06-14F9-7B81-2249-6D1586698DF1}"/>
+                <a16:creationId xmlns:a16="http://schemas.microsoft.com/office/drawing/2014/main" id="{7D2A0CA1-4CBA-F954-34DF-49EB3EAE4FF9}"/>
               </a:ext>
             </a:extLst>
           </p:cNvPr>
@@ -2835,7 +2835,7 @@
           <p:cNvPr id="4" name="テキスト プレースホルダー 3">
             <a:extLst>
               <a:ext uri="{FF2B5EF4-FFF2-40B4-BE49-F238E27FC236}">
-                <a16:creationId xmlns:a16="http://schemas.microsoft.com/office/drawing/2014/main" id="{9C7E4E45-AF2F-72B3-11F5-9C962F4D89AC}"/>
+                <a16:creationId xmlns:a16="http://schemas.microsoft.com/office/drawing/2014/main" id="{5B30B1BA-361A-4219-CBB9-E5A8FC1FF275}"/>
               </a:ext>
             </a:extLst>
           </p:cNvPr>
@@ -2906,7 +2906,7 @@
           <p:cNvPr id="5" name="日付プレースホルダー 4">
             <a:extLst>
               <a:ext uri="{FF2B5EF4-FFF2-40B4-BE49-F238E27FC236}">
-                <a16:creationId xmlns:a16="http://schemas.microsoft.com/office/drawing/2014/main" id="{F6669C76-224A-355F-C930-4B48D45779B6}"/>
+                <a16:creationId xmlns:a16="http://schemas.microsoft.com/office/drawing/2014/main" id="{06EB5629-2B56-6140-B2C3-516B6062E7E9}"/>
               </a:ext>
             </a:extLst>
           </p:cNvPr>
@@ -2922,7 +2922,7 @@
           <a:bodyPr/>
           <a:lstStyle/>
           <a:p>
-            <a:fld id="{0CC69AB9-86F8-43DB-9518-245AE0E3274F}" type="datetimeFigureOut">
+            <a:fld id="{32D09CEE-BE54-46EB-BBA5-D975FC1462A2}" type="datetimeFigureOut">
               <a:rPr kumimoji="1" lang="ja-JP" altLang="en-US" smtClean="0"/>
               <a:t>2026/7/30</a:t>
             </a:fld>
@@ -2935,7 +2935,7 @@
           <p:cNvPr id="6" name="フッター プレースホルダー 5">
             <a:extLst>
               <a:ext uri="{FF2B5EF4-FFF2-40B4-BE49-F238E27FC236}">
-                <a16:creationId xmlns:a16="http://schemas.microsoft.com/office/drawing/2014/main" id="{972A545A-17D6-AE22-2EA4-0488FDBEE53B}"/>
+                <a16:creationId xmlns:a16="http://schemas.microsoft.com/office/drawing/2014/main" id="{45B60DC7-8A92-E76C-1015-E9C31B1C916B}"/>
               </a:ext>
             </a:extLst>
           </p:cNvPr>
@@ -2960,7 +2960,7 @@
           <p:cNvPr id="7" name="スライド番号プレースホルダー 6">
             <a:extLst>
               <a:ext uri="{FF2B5EF4-FFF2-40B4-BE49-F238E27FC236}">
-                <a16:creationId xmlns:a16="http://schemas.microsoft.com/office/drawing/2014/main" id="{2B758030-58C7-5E96-894D-F4AA9829C3A7}"/>
+                <a16:creationId xmlns:a16="http://schemas.microsoft.com/office/drawing/2014/main" id="{35571213-F530-6565-DCEC-B3872F03C14E}"/>
               </a:ext>
             </a:extLst>
           </p:cNvPr>
@@ -2976,7 +2976,7 @@
           <a:bodyPr/>
           <a:lstStyle/>
           <a:p>
-            <a:fld id="{A4834A61-69C2-4F01-9D68-734E01FF19CE}" type="slidenum">
+            <a:fld id="{49A00542-BBCF-43CE-8735-71EB870E2A16}" type="slidenum">
               <a:rPr kumimoji="1" lang="ja-JP" altLang="en-US" smtClean="0"/>
               <a:t>‹#›</a:t>
             </a:fld>
@@ -2987,7 +2987,7 @@
     </p:spTree>
     <p:extLst>
       <p:ext uri="{BB962C8B-B14F-4D97-AF65-F5344CB8AC3E}">
-        <p14:creationId xmlns:p14="http://schemas.microsoft.com/office/powerpoint/2010/main" val="4024089210"/>
+        <p14:creationId xmlns:p14="http://schemas.microsoft.com/office/powerpoint/2010/main" val="1416319515"/>
       </p:ext>
     </p:extLst>
   </p:cSld>
@@ -3024,7 +3024,7 @@
           <p:cNvPr id="2" name="タイトル プレースホルダー 1">
             <a:extLst>
               <a:ext uri="{FF2B5EF4-FFF2-40B4-BE49-F238E27FC236}">
-                <a16:creationId xmlns:a16="http://schemas.microsoft.com/office/drawing/2014/main" id="{21BC7C4C-FE0F-29FC-57F8-298C21680BA3}"/>
+                <a16:creationId xmlns:a16="http://schemas.microsoft.com/office/drawing/2014/main" id="{7D632FB8-E131-2940-9132-FEAF5618394D}"/>
               </a:ext>
             </a:extLst>
           </p:cNvPr>
@@ -3062,7 +3062,7 @@
           <p:cNvPr id="3" name="テキスト プレースホルダー 2">
             <a:extLst>
               <a:ext uri="{FF2B5EF4-FFF2-40B4-BE49-F238E27FC236}">
-                <a16:creationId xmlns:a16="http://schemas.microsoft.com/office/drawing/2014/main" id="{F845BCF6-55AE-3633-27BB-E97DBD3F2E44}"/>
+                <a16:creationId xmlns:a16="http://schemas.microsoft.com/office/drawing/2014/main" id="{E4E11C2D-A894-ED95-FCB4-0B08C6BAF3DA}"/>
               </a:ext>
             </a:extLst>
           </p:cNvPr>
@@ -3161,7 +3161,7 @@
           <p:cNvPr id="4" name="日付プレースホルダー 3">
             <a:extLst>
               <a:ext uri="{FF2B5EF4-FFF2-40B4-BE49-F238E27FC236}">
-                <a16:creationId xmlns:a16="http://schemas.microsoft.com/office/drawing/2014/main" id="{B51B1101-91D8-7AB3-76BA-D189EAB8F61C}"/>
+                <a16:creationId xmlns:a16="http://schemas.microsoft.com/office/drawing/2014/main" id="{4457696E-6910-31EF-9580-C22F7C69EC50}"/>
               </a:ext>
             </a:extLst>
           </p:cNvPr>
@@ -3195,7 +3195,7 @@
             </a:lvl1pPr>
           </a:lstStyle>
           <a:p>
-            <a:fld id="{0CC69AB9-86F8-43DB-9518-245AE0E3274F}" type="datetimeFigureOut">
+            <a:fld id="{32D09CEE-BE54-46EB-BBA5-D975FC1462A2}" type="datetimeFigureOut">
               <a:rPr kumimoji="1" lang="ja-JP" altLang="en-US" smtClean="0"/>
               <a:t>2026/7/30</a:t>
             </a:fld>
@@ -3208,7 +3208,7 @@
           <p:cNvPr id="5" name="フッター プレースホルダー 4">
             <a:extLst>
               <a:ext uri="{FF2B5EF4-FFF2-40B4-BE49-F238E27FC236}">
-                <a16:creationId xmlns:a16="http://schemas.microsoft.com/office/drawing/2014/main" id="{E57615E1-7F45-DCCA-DB5C-5A6F255B6323}"/>
+                <a16:creationId xmlns:a16="http://schemas.microsoft.com/office/drawing/2014/main" id="{8BD2F6E1-8AC4-746E-FBBD-1327F75F3E85}"/>
               </a:ext>
             </a:extLst>
           </p:cNvPr>
@@ -3251,7 +3251,7 @@
           <p:cNvPr id="6" name="スライド番号プレースホルダー 5">
             <a:extLst>
               <a:ext uri="{FF2B5EF4-FFF2-40B4-BE49-F238E27FC236}">
-                <a16:creationId xmlns:a16="http://schemas.microsoft.com/office/drawing/2014/main" id="{9B9E196A-370F-A933-CA29-9E47235D2401}"/>
+                <a16:creationId xmlns:a16="http://schemas.microsoft.com/office/drawing/2014/main" id="{948F2D8F-2923-2193-5448-CCB382DA936E}"/>
               </a:ext>
             </a:extLst>
           </p:cNvPr>
@@ -3285,7 +3285,7 @@
             </a:lvl1pPr>
           </a:lstStyle>
           <a:p>
-            <a:fld id="{A4834A61-69C2-4F01-9D68-734E01FF19CE}" type="slidenum">
+            <a:fld id="{49A00542-BBCF-43CE-8735-71EB870E2A16}" type="slidenum">
               <a:rPr kumimoji="1" lang="ja-JP" altLang="en-US" smtClean="0"/>
               <a:t>‹#›</a:t>
             </a:fld>
@@ -3296,7 +3296,7 @@
     </p:spTree>
     <p:extLst>
       <p:ext uri="{BB962C8B-B14F-4D97-AF65-F5344CB8AC3E}">
-        <p14:creationId xmlns:p14="http://schemas.microsoft.com/office/powerpoint/2010/main" val="2025488709"/>
+        <p14:creationId xmlns:p14="http://schemas.microsoft.com/office/powerpoint/2010/main" val="737803198"/>
       </p:ext>
     </p:extLst>
   </p:cSld>
@@ -3619,7 +3619,7 @@
           <p:cNvPr id="2" name="テキスト ボックス 1">
             <a:extLst>
               <a:ext uri="{FF2B5EF4-FFF2-40B4-BE49-F238E27FC236}">
-                <a16:creationId xmlns:a16="http://schemas.microsoft.com/office/drawing/2014/main" id="{EF14D11D-C30A-12E7-172B-DE9616E186CF}"/>
+                <a16:creationId xmlns:a16="http://schemas.microsoft.com/office/drawing/2014/main" id="{C8D275E3-C8FE-21DD-A400-FCEFBB90A6F2}"/>
               </a:ext>
             </a:extLst>
           </p:cNvPr>
@@ -3665,7 +3665,7 @@
           <p:cNvPr id="3" name="テキスト ボックス 2">
             <a:extLst>
               <a:ext uri="{FF2B5EF4-FFF2-40B4-BE49-F238E27FC236}">
-                <a16:creationId xmlns:a16="http://schemas.microsoft.com/office/drawing/2014/main" id="{41E1F06C-039B-C11C-D4C1-6371AFDCE910}"/>
+                <a16:creationId xmlns:a16="http://schemas.microsoft.com/office/drawing/2014/main" id="{796457DD-99D3-8857-A0DF-DBBA7652F50A}"/>
               </a:ext>
             </a:extLst>
           </p:cNvPr>
@@ -3714,7 +3714,7 @@
           <p:cNvPr id="4" name="テキスト ボックス 3">
             <a:extLst>
               <a:ext uri="{FF2B5EF4-FFF2-40B4-BE49-F238E27FC236}">
-                <a16:creationId xmlns:a16="http://schemas.microsoft.com/office/drawing/2014/main" id="{6849AD15-4819-7D7E-ACDC-F82F5474E125}"/>
+                <a16:creationId xmlns:a16="http://schemas.microsoft.com/office/drawing/2014/main" id="{FDB90E64-75E7-35A8-8F69-7D171B5E00C2}"/>
               </a:ext>
             </a:extLst>
           </p:cNvPr>
@@ -3754,7 +3754,7 @@
           <p:cNvPr id="5" name="テキスト ボックス 4">
             <a:extLst>
               <a:ext uri="{FF2B5EF4-FFF2-40B4-BE49-F238E27FC236}">
-                <a16:creationId xmlns:a16="http://schemas.microsoft.com/office/drawing/2014/main" id="{1E966D2C-1736-5C34-4B56-083C59AAF16D}"/>
+                <a16:creationId xmlns:a16="http://schemas.microsoft.com/office/drawing/2014/main" id="{37C0605A-A4A1-8087-66D9-BEEFB8936AC9}"/>
               </a:ext>
             </a:extLst>
           </p:cNvPr>
@@ -3801,7 +3801,7 @@
             <a:hlinkClick r:id="" action="ppaction://media"/>
             <a:extLst>
               <a:ext uri="{FF2B5EF4-FFF2-40B4-BE49-F238E27FC236}">
-                <a16:creationId xmlns:a16="http://schemas.microsoft.com/office/drawing/2014/main" id="{53A28EE0-0DDC-4D3C-B7F2-A4D03EFB6929}"/>
+                <a16:creationId xmlns:a16="http://schemas.microsoft.com/office/drawing/2014/main" id="{A51C93ED-44C4-EA9A-D476-3B0CC0103225}"/>
               </a:ext>
             </a:extLst>
           </p:cNvPr>
@@ -3836,7 +3836,7 @@
     </p:spTree>
     <p:extLst>
       <p:ext uri="{BB962C8B-B14F-4D97-AF65-F5344CB8AC3E}">
-        <p14:creationId xmlns:p14="http://schemas.microsoft.com/office/powerpoint/2010/main" val="3615188858"/>
+        <p14:creationId xmlns:p14="http://schemas.microsoft.com/office/powerpoint/2010/main" val="712146054"/>
       </p:ext>
     </p:extLst>
   </p:cSld>
@@ -3960,7 +3960,7 @@
           <p:cNvPr id="2" name="テキスト ボックス 1">
             <a:extLst>
               <a:ext uri="{FF2B5EF4-FFF2-40B4-BE49-F238E27FC236}">
-                <a16:creationId xmlns:a16="http://schemas.microsoft.com/office/drawing/2014/main" id="{308DEB76-DDD1-F577-80C2-744AAC18114B}"/>
+                <a16:creationId xmlns:a16="http://schemas.microsoft.com/office/drawing/2014/main" id="{D32822C0-718B-E417-0243-7C0DF95C7124}"/>
               </a:ext>
             </a:extLst>
           </p:cNvPr>
@@ -4006,7 +4006,7 @@
           <p:cNvPr id="3" name="テキスト ボックス 2">
             <a:extLst>
               <a:ext uri="{FF2B5EF4-FFF2-40B4-BE49-F238E27FC236}">
-                <a16:creationId xmlns:a16="http://schemas.microsoft.com/office/drawing/2014/main" id="{57D4F729-9F05-7BC1-DA00-9CF98249D56E}"/>
+                <a16:creationId xmlns:a16="http://schemas.microsoft.com/office/drawing/2014/main" id="{05BE0D4E-F76E-CEC7-FC41-C6CBC99448AB}"/>
               </a:ext>
             </a:extLst>
           </p:cNvPr>
@@ -4046,7 +4046,7 @@
           <p:cNvPr id="4" name="テキスト ボックス 3">
             <a:extLst>
               <a:ext uri="{FF2B5EF4-FFF2-40B4-BE49-F238E27FC236}">
-                <a16:creationId xmlns:a16="http://schemas.microsoft.com/office/drawing/2014/main" id="{31A466C9-D9C7-02B1-CC0E-A9B8BE3F35F1}"/>
+                <a16:creationId xmlns:a16="http://schemas.microsoft.com/office/drawing/2014/main" id="{8A1C3E15-2305-2421-7D85-BCB2C49121AB}"/>
               </a:ext>
             </a:extLst>
           </p:cNvPr>
@@ -4076,14 +4076,17 @@
                 </a:solidFill>
                 <a:latin typeface="Arial" panose="020B0604020202020204" pitchFamily="34" charset="0"/>
               </a:rPr>
-              <a:t>About Laravel Laravel is a web application framework with expressive, elegant syntax</a:t>
-            </a:r>
-            <a:endParaRPr kumimoji="1" lang="ja-JP" altLang="en-US" sz="2000">
-              <a:solidFill>
-                <a:srgbClr val="333333"/>
-              </a:solidFill>
-              <a:latin typeface="Arial" panose="020B0604020202020204" pitchFamily="34" charset="0"/>
-            </a:endParaRPr>
+              <a:t>Golf Search</a:t>
+            </a:r>
+            <a:r>
+              <a:rPr kumimoji="1" lang="ja-JP" altLang="en-US" sz="2000">
+                <a:solidFill>
+                  <a:srgbClr val="333333"/>
+                </a:solidFill>
+                <a:latin typeface="Arial" panose="020B0604020202020204" pitchFamily="34" charset="0"/>
+              </a:rPr>
+              <a:t>の目的、構成、実装を公開コードから確認できるプロジェクトです。</a:t>
+            </a:r>
           </a:p>
         </p:txBody>
       </p:sp>
@@ -4092,7 +4095,7 @@
           <p:cNvPr id="5" name="テキスト ボックス 4">
             <a:extLst>
               <a:ext uri="{FF2B5EF4-FFF2-40B4-BE49-F238E27FC236}">
-                <a16:creationId xmlns:a16="http://schemas.microsoft.com/office/drawing/2014/main" id="{6E68B7E0-5B42-AEC3-9939-5579C1531EA7}"/>
+                <a16:creationId xmlns:a16="http://schemas.microsoft.com/office/drawing/2014/main" id="{64A97FAB-11D6-7F52-309F-2C0C95ECF7CC}"/>
               </a:ext>
             </a:extLst>
           </p:cNvPr>
@@ -4139,7 +4142,7 @@
             <a:hlinkClick r:id="" action="ppaction://media"/>
             <a:extLst>
               <a:ext uri="{FF2B5EF4-FFF2-40B4-BE49-F238E27FC236}">
-                <a16:creationId xmlns:a16="http://schemas.microsoft.com/office/drawing/2014/main" id="{520E856E-22F2-EA66-21CC-13EE5763029F}"/>
+                <a16:creationId xmlns:a16="http://schemas.microsoft.com/office/drawing/2014/main" id="{8668B38D-2E46-9FF6-B13D-3E1CEE9213B0}"/>
               </a:ext>
             </a:extLst>
           </p:cNvPr>
@@ -4174,7 +4177,7 @@
     </p:spTree>
     <p:extLst>
       <p:ext uri="{BB962C8B-B14F-4D97-AF65-F5344CB8AC3E}">
-        <p14:creationId xmlns:p14="http://schemas.microsoft.com/office/powerpoint/2010/main" val="3218002693"/>
+        <p14:creationId xmlns:p14="http://schemas.microsoft.com/office/powerpoint/2010/main" val="137047069"/>
       </p:ext>
     </p:extLst>
   </p:cSld>
@@ -4217,7 +4220,7 @@
                                   <p:childTnLst>
                                     <p:cmd type="call" cmd="playFrom(0.0)">
                                       <p:cBhvr>
-                                        <p:cTn id="6" dur="7780" fill="hold"/>
+                                        <p:cTn id="6" dur="7051" fill="hold"/>
                                         <p:tgtEl>
                                           <p:spTgt spid="6"/>
                                         </p:tgtEl>
@@ -4298,7 +4301,7 @@
           <p:cNvPr id="2" name="テキスト ボックス 1">
             <a:extLst>
               <a:ext uri="{FF2B5EF4-FFF2-40B4-BE49-F238E27FC236}">
-                <a16:creationId xmlns:a16="http://schemas.microsoft.com/office/drawing/2014/main" id="{62741B41-076D-32B5-8016-AF4EE2FD233C}"/>
+                <a16:creationId xmlns:a16="http://schemas.microsoft.com/office/drawing/2014/main" id="{AADDC21A-7578-AAF1-2D7F-E396AE8C7565}"/>
               </a:ext>
             </a:extLst>
           </p:cNvPr>
@@ -4344,7 +4347,7 @@
           <p:cNvPr id="3" name="テキスト ボックス 2">
             <a:extLst>
               <a:ext uri="{FF2B5EF4-FFF2-40B4-BE49-F238E27FC236}">
-                <a16:creationId xmlns:a16="http://schemas.microsoft.com/office/drawing/2014/main" id="{716203A8-B424-3E1F-D25D-04DF58354C9B}"/>
+                <a16:creationId xmlns:a16="http://schemas.microsoft.com/office/drawing/2014/main" id="{4D42F969-E70B-DA70-0620-BA5482660BF3}"/>
               </a:ext>
             </a:extLst>
           </p:cNvPr>
@@ -4384,7 +4387,7 @@
           <p:cNvPr id="4" name="テキスト ボックス 3">
             <a:extLst>
               <a:ext uri="{FF2B5EF4-FFF2-40B4-BE49-F238E27FC236}">
-                <a16:creationId xmlns:a16="http://schemas.microsoft.com/office/drawing/2014/main" id="{19933249-8C4F-21D7-03D6-6BEF90417A59}"/>
+                <a16:creationId xmlns:a16="http://schemas.microsoft.com/office/drawing/2014/main" id="{725B281C-E8D7-2F73-C30F-0C01F73F33E9}"/>
               </a:ext>
             </a:extLst>
           </p:cNvPr>
@@ -4497,7 +4500,7 @@
           <p:cNvPr id="5" name="テキスト ボックス 4">
             <a:extLst>
               <a:ext uri="{FF2B5EF4-FFF2-40B4-BE49-F238E27FC236}">
-                <a16:creationId xmlns:a16="http://schemas.microsoft.com/office/drawing/2014/main" id="{C60186EA-52C4-BAAB-F8E5-D06ACB89193D}"/>
+                <a16:creationId xmlns:a16="http://schemas.microsoft.com/office/drawing/2014/main" id="{9BBE3368-AD4F-AE78-FD11-2D55828B5773}"/>
               </a:ext>
             </a:extLst>
           </p:cNvPr>
@@ -4544,7 +4547,7 @@
             <a:hlinkClick r:id="" action="ppaction://media"/>
             <a:extLst>
               <a:ext uri="{FF2B5EF4-FFF2-40B4-BE49-F238E27FC236}">
-                <a16:creationId xmlns:a16="http://schemas.microsoft.com/office/drawing/2014/main" id="{9CA60DC5-693A-EF3E-4760-DE454A8A8B9A}"/>
+                <a16:creationId xmlns:a16="http://schemas.microsoft.com/office/drawing/2014/main" id="{AF73D1ED-A53D-C281-A500-3E456CFE9AD7}"/>
               </a:ext>
             </a:extLst>
           </p:cNvPr>
@@ -4579,7 +4582,7 @@
     </p:spTree>
     <p:extLst>
       <p:ext uri="{BB962C8B-B14F-4D97-AF65-F5344CB8AC3E}">
-        <p14:creationId xmlns:p14="http://schemas.microsoft.com/office/powerpoint/2010/main" val="2904371738"/>
+        <p14:creationId xmlns:p14="http://schemas.microsoft.com/office/powerpoint/2010/main" val="1068165535"/>
       </p:ext>
     </p:extLst>
   </p:cSld>
@@ -4703,7 +4706,7 @@
           <p:cNvPr id="2" name="テキスト ボックス 1">
             <a:extLst>
               <a:ext uri="{FF2B5EF4-FFF2-40B4-BE49-F238E27FC236}">
-                <a16:creationId xmlns:a16="http://schemas.microsoft.com/office/drawing/2014/main" id="{92F66525-1166-0B80-CEB6-D4F360944451}"/>
+                <a16:creationId xmlns:a16="http://schemas.microsoft.com/office/drawing/2014/main" id="{F0471FA3-7E52-5A93-4567-3CD116314F9C}"/>
               </a:ext>
             </a:extLst>
           </p:cNvPr>
@@ -4749,7 +4752,7 @@
           <p:cNvPr id="3" name="テキスト ボックス 2">
             <a:extLst>
               <a:ext uri="{FF2B5EF4-FFF2-40B4-BE49-F238E27FC236}">
-                <a16:creationId xmlns:a16="http://schemas.microsoft.com/office/drawing/2014/main" id="{CFD638BF-BD9E-9FF1-8808-58313C95CF3B}"/>
+                <a16:creationId xmlns:a16="http://schemas.microsoft.com/office/drawing/2014/main" id="{9A608065-28C1-842D-E13E-A364526733E3}"/>
               </a:ext>
             </a:extLst>
           </p:cNvPr>
@@ -4789,7 +4792,7 @@
           <p:cNvPr id="4" name="テキスト ボックス 3">
             <a:extLst>
               <a:ext uri="{FF2B5EF4-FFF2-40B4-BE49-F238E27FC236}">
-                <a16:creationId xmlns:a16="http://schemas.microsoft.com/office/drawing/2014/main" id="{90E07594-55DA-432E-B4BF-CD6116A663AB}"/>
+                <a16:creationId xmlns:a16="http://schemas.microsoft.com/office/drawing/2014/main" id="{1044522E-B130-E902-E331-90AAD65F6D6B}"/>
               </a:ext>
             </a:extLst>
           </p:cNvPr>
@@ -4899,7 +4902,7 @@
           <p:cNvPr id="5" name="テキスト ボックス 4">
             <a:extLst>
               <a:ext uri="{FF2B5EF4-FFF2-40B4-BE49-F238E27FC236}">
-                <a16:creationId xmlns:a16="http://schemas.microsoft.com/office/drawing/2014/main" id="{22EA5B24-FDB2-B2A7-1987-4F84C04C4BA4}"/>
+                <a16:creationId xmlns:a16="http://schemas.microsoft.com/office/drawing/2014/main" id="{BCA5D523-6B28-5F98-B093-83709B3D75F4}"/>
               </a:ext>
             </a:extLst>
           </p:cNvPr>
@@ -4946,7 +4949,7 @@
             <a:hlinkClick r:id="" action="ppaction://media"/>
             <a:extLst>
               <a:ext uri="{FF2B5EF4-FFF2-40B4-BE49-F238E27FC236}">
-                <a16:creationId xmlns:a16="http://schemas.microsoft.com/office/drawing/2014/main" id="{2286B5E1-319B-1CF6-A6FE-FDDBBF6BB5B2}"/>
+                <a16:creationId xmlns:a16="http://schemas.microsoft.com/office/drawing/2014/main" id="{4A7D4F9E-3993-437F-B7F4-1B202444033A}"/>
               </a:ext>
             </a:extLst>
           </p:cNvPr>
@@ -4981,7 +4984,7 @@
     </p:spTree>
     <p:extLst>
       <p:ext uri="{BB962C8B-B14F-4D97-AF65-F5344CB8AC3E}">
-        <p14:creationId xmlns:p14="http://schemas.microsoft.com/office/powerpoint/2010/main" val="3954617370"/>
+        <p14:creationId xmlns:p14="http://schemas.microsoft.com/office/powerpoint/2010/main" val="65847216"/>
       </p:ext>
     </p:extLst>
   </p:cSld>
@@ -5105,7 +5108,7 @@
           <p:cNvPr id="2" name="テキスト ボックス 1">
             <a:extLst>
               <a:ext uri="{FF2B5EF4-FFF2-40B4-BE49-F238E27FC236}">
-                <a16:creationId xmlns:a16="http://schemas.microsoft.com/office/drawing/2014/main" id="{BB9B8CD8-0DA7-9B01-2736-7A117BB64A50}"/>
+                <a16:creationId xmlns:a16="http://schemas.microsoft.com/office/drawing/2014/main" id="{C8881C60-A64B-A88D-60A2-5F4CE423A01D}"/>
               </a:ext>
             </a:extLst>
           </p:cNvPr>
@@ -5151,7 +5154,7 @@
           <p:cNvPr id="3" name="テキスト ボックス 2">
             <a:extLst>
               <a:ext uri="{FF2B5EF4-FFF2-40B4-BE49-F238E27FC236}">
-                <a16:creationId xmlns:a16="http://schemas.microsoft.com/office/drawing/2014/main" id="{E138DE92-905A-4DFC-D2D5-C5D911E994AC}"/>
+                <a16:creationId xmlns:a16="http://schemas.microsoft.com/office/drawing/2014/main" id="{A8E01288-12F1-6F6A-AD3A-1237A1A13E4F}"/>
               </a:ext>
             </a:extLst>
           </p:cNvPr>
@@ -5191,7 +5194,7 @@
           <p:cNvPr id="4" name="テキスト ボックス 3">
             <a:extLst>
               <a:ext uri="{FF2B5EF4-FFF2-40B4-BE49-F238E27FC236}">
-                <a16:creationId xmlns:a16="http://schemas.microsoft.com/office/drawing/2014/main" id="{ECAC61E4-5BD8-F455-C0C3-3DEC67D3D759}"/>
+                <a16:creationId xmlns:a16="http://schemas.microsoft.com/office/drawing/2014/main" id="{2DDC6BBE-C4C5-812C-DDED-52C929BDC758}"/>
               </a:ext>
             </a:extLst>
           </p:cNvPr>
@@ -5215,20 +5218,14 @@
           <a:lstStyle/>
           <a:p>
             <a:r>
-              <a:rPr kumimoji="1" lang="en-US" altLang="ja-JP" sz="2000">
+              <a:rPr kumimoji="1" lang="ja-JP" altLang="en-US" sz="2000">
                 <a:solidFill>
                   <a:srgbClr val="333333"/>
                 </a:solidFill>
                 <a:latin typeface="Arial" panose="020B0604020202020204" pitchFamily="34" charset="0"/>
               </a:rPr>
-              <a:t>$(cat &lt;&lt;'EOF'</a:t>
-            </a:r>
-            <a:endParaRPr kumimoji="1" lang="ja-JP" altLang="en-US" sz="2000">
-              <a:solidFill>
-                <a:srgbClr val="333333"/>
-              </a:solidFill>
-              <a:latin typeface="Arial" panose="020B0604020202020204" pitchFamily="34" charset="0"/>
-            </a:endParaRPr>
+              <a:t>直近のコミットでは、実装の見直しと継続的な改善が行われました。</a:t>
+            </a:r>
           </a:p>
         </p:txBody>
       </p:sp>
@@ -5237,7 +5234,7 @@
           <p:cNvPr id="5" name="テキスト ボックス 4">
             <a:extLst>
               <a:ext uri="{FF2B5EF4-FFF2-40B4-BE49-F238E27FC236}">
-                <a16:creationId xmlns:a16="http://schemas.microsoft.com/office/drawing/2014/main" id="{AC40DC62-A3BA-CBE0-89DD-5249BF53F0A9}"/>
+                <a16:creationId xmlns:a16="http://schemas.microsoft.com/office/drawing/2014/main" id="{B6405BF6-E9D4-C898-631B-C8C848075EE9}"/>
               </a:ext>
             </a:extLst>
           </p:cNvPr>
@@ -5284,7 +5281,7 @@
             <a:hlinkClick r:id="" action="ppaction://media"/>
             <a:extLst>
               <a:ext uri="{FF2B5EF4-FFF2-40B4-BE49-F238E27FC236}">
-                <a16:creationId xmlns:a16="http://schemas.microsoft.com/office/drawing/2014/main" id="{2326C8D9-E2F1-1459-2DF3-BDE7BE9D0CE9}"/>
+                <a16:creationId xmlns:a16="http://schemas.microsoft.com/office/drawing/2014/main" id="{7F5DE46E-A979-1844-0B02-A810B9B7F2F4}"/>
               </a:ext>
             </a:extLst>
           </p:cNvPr>
@@ -5319,7 +5316,7 @@
     </p:spTree>
     <p:extLst>
       <p:ext uri="{BB962C8B-B14F-4D97-AF65-F5344CB8AC3E}">
-        <p14:creationId xmlns:p14="http://schemas.microsoft.com/office/powerpoint/2010/main" val="3279909859"/>
+        <p14:creationId xmlns:p14="http://schemas.microsoft.com/office/powerpoint/2010/main" val="424482103"/>
       </p:ext>
     </p:extLst>
   </p:cSld>
@@ -5328,10 +5325,10 @@
   </p:clrMapOvr>
   <mc:AlternateContent xmlns:mc="http://schemas.openxmlformats.org/markup-compatibility/2006">
     <mc:Choice xmlns:p14="http://schemas.microsoft.com/office/powerpoint/2010/main" Requires="p14">
-      <p:transition spd="slow" p14:dur="2000" advTm="9000"/>
+      <p:transition spd="slow" p14:dur="2000" advTm="7000"/>
     </mc:Choice>
     <mc:Fallback>
-      <p:transition spd="slow" advTm="9000"/>
+      <p:transition spd="slow" advTm="7000"/>
     </mc:Fallback>
   </mc:AlternateContent>
   <p:timing>
@@ -5362,7 +5359,7 @@
                                   <p:childTnLst>
                                     <p:cmd type="call" cmd="playFrom(0.0)">
                                       <p:cBhvr>
-                                        <p:cTn id="6" dur="8006" fill="hold"/>
+                                        <p:cTn id="6" dur="6076" fill="hold"/>
                                         <p:tgtEl>
                                           <p:spTgt spid="6"/>
                                         </p:tgtEl>
@@ -5443,7 +5440,7 @@
           <p:cNvPr id="2" name="テキスト ボックス 1">
             <a:extLst>
               <a:ext uri="{FF2B5EF4-FFF2-40B4-BE49-F238E27FC236}">
-                <a16:creationId xmlns:a16="http://schemas.microsoft.com/office/drawing/2014/main" id="{FD649AAB-8FE5-83A2-8EA2-F2E21E6A9724}"/>
+                <a16:creationId xmlns:a16="http://schemas.microsoft.com/office/drawing/2014/main" id="{CBA347F9-8E07-8D07-28D8-15E8A29AB047}"/>
               </a:ext>
             </a:extLst>
           </p:cNvPr>
@@ -5489,7 +5486,7 @@
           <p:cNvPr id="3" name="テキスト ボックス 2">
             <a:extLst>
               <a:ext uri="{FF2B5EF4-FFF2-40B4-BE49-F238E27FC236}">
-                <a16:creationId xmlns:a16="http://schemas.microsoft.com/office/drawing/2014/main" id="{BB3D60DF-B191-6528-D9AA-9748A00E67D6}"/>
+                <a16:creationId xmlns:a16="http://schemas.microsoft.com/office/drawing/2014/main" id="{3AB001F9-C9C8-A255-6A67-11B518D4D23A}"/>
               </a:ext>
             </a:extLst>
           </p:cNvPr>
@@ -5529,7 +5526,7 @@
           <p:cNvPr id="4" name="テキスト ボックス 3">
             <a:extLst>
               <a:ext uri="{FF2B5EF4-FFF2-40B4-BE49-F238E27FC236}">
-                <a16:creationId xmlns:a16="http://schemas.microsoft.com/office/drawing/2014/main" id="{2E0190BC-FCA7-4483-7F5C-41E3E39F5CC7}"/>
+                <a16:creationId xmlns:a16="http://schemas.microsoft.com/office/drawing/2014/main" id="{92AC1093-E69C-90EA-5E5B-CB287F0E831D}"/>
               </a:ext>
             </a:extLst>
           </p:cNvPr>
@@ -5594,7 +5591,7 @@
           <p:cNvPr id="5" name="テキスト ボックス 4">
             <a:extLst>
               <a:ext uri="{FF2B5EF4-FFF2-40B4-BE49-F238E27FC236}">
-                <a16:creationId xmlns:a16="http://schemas.microsoft.com/office/drawing/2014/main" id="{C09B710F-180E-D1CB-E649-2BF804A2FAE5}"/>
+                <a16:creationId xmlns:a16="http://schemas.microsoft.com/office/drawing/2014/main" id="{71A36F83-ECAF-7D31-9C00-FA9B408E8031}"/>
               </a:ext>
             </a:extLst>
           </p:cNvPr>
@@ -5641,7 +5638,7 @@
             <a:hlinkClick r:id="" action="ppaction://media"/>
             <a:extLst>
               <a:ext uri="{FF2B5EF4-FFF2-40B4-BE49-F238E27FC236}">
-                <a16:creationId xmlns:a16="http://schemas.microsoft.com/office/drawing/2014/main" id="{EDD45D5F-812F-5757-3955-327DAF55C7D0}"/>
+                <a16:creationId xmlns:a16="http://schemas.microsoft.com/office/drawing/2014/main" id="{A4649D06-042B-1BE0-7F6E-9C9FB0ED459B}"/>
               </a:ext>
             </a:extLst>
           </p:cNvPr>
@@ -5676,7 +5673,7 @@
     </p:spTree>
     <p:extLst>
       <p:ext uri="{BB962C8B-B14F-4D97-AF65-F5344CB8AC3E}">
-        <p14:creationId xmlns:p14="http://schemas.microsoft.com/office/powerpoint/2010/main" val="2420802495"/>
+        <p14:creationId xmlns:p14="http://schemas.microsoft.com/office/powerpoint/2010/main" val="1162960755"/>
       </p:ext>
     </p:extLst>
   </p:cSld>
